--- a/02/ppt/02-1_개발_도구_설치와_확인_v1.pptx
+++ b/02/ppt/02-1_개발_도구_설치와_확인_v1.pptx
@@ -2,37 +2,37 @@
 <file path=ppt/presentation.xml><?xml version="1.0" encoding="utf-8"?>
 <p:presentation xmlns:p="http://schemas.openxmlformats.org/presentationml/2006/main">
   <p:sldMasterIdLst>
-    <p:sldMasterId xmlns:r="http://schemas.openxmlformats.org/officeDocument/2006/relationships" id="2147483648" r:id="Rea420f2d365842f4"/>
+    <p:sldMasterId xmlns:r="http://schemas.openxmlformats.org/officeDocument/2006/relationships" id="2147483648" r:id="R5d1fd8359f5044f4"/>
   </p:sldMasterIdLst>
   <p:notesMasterIdLst>
-    <p:notesMasterId xmlns:r="http://schemas.openxmlformats.org/officeDocument/2006/relationships" r:id="R29730365aa524b5f"/>
+    <p:notesMasterId xmlns:r="http://schemas.openxmlformats.org/officeDocument/2006/relationships" r:id="R64d532c52b0741e3"/>
   </p:notesMasterIdLst>
   <p:sldIdLst>
-    <p:sldId xmlns:r="http://schemas.openxmlformats.org/officeDocument/2006/relationships" id="256" r:id="R87e65e747871463b"/>
-    <p:sldId xmlns:r="http://schemas.openxmlformats.org/officeDocument/2006/relationships" id="257" r:id="Rb0c7d8efe3a7453a"/>
-    <p:sldId xmlns:r="http://schemas.openxmlformats.org/officeDocument/2006/relationships" id="258" r:id="R3eb00db996ab4626"/>
-    <p:sldId xmlns:r="http://schemas.openxmlformats.org/officeDocument/2006/relationships" id="259" r:id="Rd796c9202fd0434a"/>
-    <p:sldId xmlns:r="http://schemas.openxmlformats.org/officeDocument/2006/relationships" id="260" r:id="Re29a13527e71451b"/>
-    <p:sldId xmlns:r="http://schemas.openxmlformats.org/officeDocument/2006/relationships" id="261" r:id="Ra19e1ff31bc747e6"/>
-    <p:sldId xmlns:r="http://schemas.openxmlformats.org/officeDocument/2006/relationships" id="262" r:id="R40e815b7c34e4238"/>
-    <p:sldId xmlns:r="http://schemas.openxmlformats.org/officeDocument/2006/relationships" id="263" r:id="R71778ae0ef1445e8"/>
-    <p:sldId xmlns:r="http://schemas.openxmlformats.org/officeDocument/2006/relationships" id="264" r:id="R3f7759d427d9416e"/>
-    <p:sldId xmlns:r="http://schemas.openxmlformats.org/officeDocument/2006/relationships" id="265" r:id="Ra186aca53fd94e59"/>
-    <p:sldId xmlns:r="http://schemas.openxmlformats.org/officeDocument/2006/relationships" id="266" r:id="Ra5ac3fbc7eec45da"/>
-    <p:sldId xmlns:r="http://schemas.openxmlformats.org/officeDocument/2006/relationships" id="267" r:id="Ra9a0cbf46277419a"/>
-    <p:sldId xmlns:r="http://schemas.openxmlformats.org/officeDocument/2006/relationships" id="268" r:id="Rdbfefcef08e24cb8"/>
-    <p:sldId xmlns:r="http://schemas.openxmlformats.org/officeDocument/2006/relationships" id="269" r:id="Rcb1d5af7c32e42da"/>
-    <p:sldId xmlns:r="http://schemas.openxmlformats.org/officeDocument/2006/relationships" id="270" r:id="Recebd7fb659044f6"/>
-    <p:sldId xmlns:r="http://schemas.openxmlformats.org/officeDocument/2006/relationships" id="271" r:id="R8eea5283d5b34493"/>
-    <p:sldId xmlns:r="http://schemas.openxmlformats.org/officeDocument/2006/relationships" id="272" r:id="R641402eb9ef1406a"/>
-    <p:sldId xmlns:r="http://schemas.openxmlformats.org/officeDocument/2006/relationships" id="273" r:id="R2b25bd119bc84c59"/>
-    <p:sldId xmlns:r="http://schemas.openxmlformats.org/officeDocument/2006/relationships" id="274" r:id="Rcdd8ef0151614c33"/>
-    <p:sldId xmlns:r="http://schemas.openxmlformats.org/officeDocument/2006/relationships" id="275" r:id="R4a838e3bc6934d1c"/>
-    <p:sldId xmlns:r="http://schemas.openxmlformats.org/officeDocument/2006/relationships" id="276" r:id="R368dde7fdd8a4591"/>
-    <p:sldId xmlns:r="http://schemas.openxmlformats.org/officeDocument/2006/relationships" id="277" r:id="R1b4a86635f534096"/>
-    <p:sldId xmlns:r="http://schemas.openxmlformats.org/officeDocument/2006/relationships" id="278" r:id="R283384de76894283"/>
-    <p:sldId xmlns:r="http://schemas.openxmlformats.org/officeDocument/2006/relationships" id="279" r:id="R861edda3b21b463a"/>
-    <p:sldId xmlns:r="http://schemas.openxmlformats.org/officeDocument/2006/relationships" id="280" r:id="R8c190be0479749cf"/>
+    <p:sldId xmlns:r="http://schemas.openxmlformats.org/officeDocument/2006/relationships" id="256" r:id="Rfcc5fda90c8a485c"/>
+    <p:sldId xmlns:r="http://schemas.openxmlformats.org/officeDocument/2006/relationships" id="257" r:id="R831e3dd9f95045b8"/>
+    <p:sldId xmlns:r="http://schemas.openxmlformats.org/officeDocument/2006/relationships" id="258" r:id="R41c47b2df92b46ac"/>
+    <p:sldId xmlns:r="http://schemas.openxmlformats.org/officeDocument/2006/relationships" id="259" r:id="R87240c53094a4086"/>
+    <p:sldId xmlns:r="http://schemas.openxmlformats.org/officeDocument/2006/relationships" id="260" r:id="Rfd099b405be04001"/>
+    <p:sldId xmlns:r="http://schemas.openxmlformats.org/officeDocument/2006/relationships" id="261" r:id="R38de9f4b5e1e4d5e"/>
+    <p:sldId xmlns:r="http://schemas.openxmlformats.org/officeDocument/2006/relationships" id="262" r:id="Ra88bbc1b5a8c40fb"/>
+    <p:sldId xmlns:r="http://schemas.openxmlformats.org/officeDocument/2006/relationships" id="263" r:id="R441256f219df4ea8"/>
+    <p:sldId xmlns:r="http://schemas.openxmlformats.org/officeDocument/2006/relationships" id="264" r:id="Rb6af116886ff42d8"/>
+    <p:sldId xmlns:r="http://schemas.openxmlformats.org/officeDocument/2006/relationships" id="265" r:id="Rc53d6d0f555d45f7"/>
+    <p:sldId xmlns:r="http://schemas.openxmlformats.org/officeDocument/2006/relationships" id="266" r:id="Rb12851e41a3c434f"/>
+    <p:sldId xmlns:r="http://schemas.openxmlformats.org/officeDocument/2006/relationships" id="267" r:id="R4d733f21e7e7462a"/>
+    <p:sldId xmlns:r="http://schemas.openxmlformats.org/officeDocument/2006/relationships" id="268" r:id="R523e94202426496e"/>
+    <p:sldId xmlns:r="http://schemas.openxmlformats.org/officeDocument/2006/relationships" id="269" r:id="R7ce6d612f7de43d1"/>
+    <p:sldId xmlns:r="http://schemas.openxmlformats.org/officeDocument/2006/relationships" id="270" r:id="R75345619a3c343d1"/>
+    <p:sldId xmlns:r="http://schemas.openxmlformats.org/officeDocument/2006/relationships" id="271" r:id="R46c85a124f05419b"/>
+    <p:sldId xmlns:r="http://schemas.openxmlformats.org/officeDocument/2006/relationships" id="272" r:id="Rec9e5dbd067b4469"/>
+    <p:sldId xmlns:r="http://schemas.openxmlformats.org/officeDocument/2006/relationships" id="273" r:id="Rbe9075669fa245ca"/>
+    <p:sldId xmlns:r="http://schemas.openxmlformats.org/officeDocument/2006/relationships" id="274" r:id="R8bbcf5d852274186"/>
+    <p:sldId xmlns:r="http://schemas.openxmlformats.org/officeDocument/2006/relationships" id="275" r:id="R881c74b498904f9f"/>
+    <p:sldId xmlns:r="http://schemas.openxmlformats.org/officeDocument/2006/relationships" id="276" r:id="R5c7d9fa0f15148c8"/>
+    <p:sldId xmlns:r="http://schemas.openxmlformats.org/officeDocument/2006/relationships" id="277" r:id="Rc857493b11804860"/>
+    <p:sldId xmlns:r="http://schemas.openxmlformats.org/officeDocument/2006/relationships" id="278" r:id="R4cfea6b0848d443e"/>
+    <p:sldId xmlns:r="http://schemas.openxmlformats.org/officeDocument/2006/relationships" id="279" r:id="R29f7b822879b4bd4"/>
+    <p:sldId xmlns:r="http://schemas.openxmlformats.org/officeDocument/2006/relationships" id="280" r:id="R30ad5141201b40ae"/>
   </p:sldIdLst>
   <p:sldSz cx="12192000" cy="6858000"/>
   <p:notesSz cx="6858000" cy="9144000"/>
@@ -716,7 +716,7 @@
           <a:lstStyle xmlns:a="http://schemas.openxmlformats.org/drawingml/2006/main"/>
           <a:p xmlns:a="http://schemas.openxmlformats.org/drawingml/2006/main">
             <a:r>
-              <a:t>OpenCode는 허용한 프로젝트 폴더 안의 파일을 읽고 만들거나 고치는 AI 도구라고 설명한다.</a:t>
+              <a:t>OpenCode는 사용자의 요청을 받아 AI 모델·프로젝트 파일·도구를 연결하고 작업을 진행하는 에이전트라고 설명한다.</a:t>
             </a:r>
           </a:p>
           <a:p xmlns:a="http://schemas.openxmlformats.org/drawingml/2006/main">
@@ -891,7 +891,7 @@
           </a:p>
           <a:p xmlns:a="http://schemas.openxmlformats.org/drawingml/2006/main">
             <a:r>
-              <a:t>연결과 모델 선택은 sample 폴더를 VS Code로 연 뒤 진행한다. 명령을 찾지 못하면 PowerShell을 완전히 닫고 새로 열어 다시 확인한다.</a:t>
+              <a:t>연결과 모델 선택은 VS Code 설치를 마치고 터미널을 연 뒤 진행한다. 명령을 찾지 못하면 PowerShell을 완전히 닫고 새로 열어 다시 확인한다.</a:t>
             </a:r>
           </a:p>
         </p:txBody>
@@ -1156,7 +1156,7 @@
           <a:lstStyle xmlns:a="http://schemas.openxmlformats.org/drawingml/2006/main"/>
           <a:p xmlns:a="http://schemas.openxmlformats.org/drawingml/2006/main">
             <a:r>
-              <a:t>실제 sample 폴더가 열린 화면이다. 1. 탐색기는 폴더와 파일이 보이는 영역이고, 4. 확장은 왼쪽 활동 표시줄의 네모 네 개 아이콘이다.</a:t>
+              <a:t>실제 VS Code 화면이다. 1. 탐색기는 폴더와 파일이 보이는 영역이고, 4. 확장은 왼쪽 활동 표시줄의 네모 네 개 아이콘이다.</a:t>
             </a:r>
           </a:p>
           <a:p xmlns:a="http://schemas.openxmlformats.org/drawingml/2006/main">
@@ -1324,6 +1324,11 @@
               <a:t>검색 결과만 보여 주지 않는다. Korean Language Pack 상세 페이지를 선택한 상태에서 이름, Microsoft 게시자, Install 버튼을 함께 확인한다.</a:t>
             </a:r>
           </a:p>
+          <a:p xmlns:a="http://schemas.openxmlformats.org/drawingml/2006/main">
+            <a:r>
+              <a:t>한국어와 중국어 언어팩을 모두 설치한 학생은 Ctrl+Shift+P에서 Configure Display Language를 검색하고, ko 또는 zh-cn을 선택한 뒤 VS Code를 재시작하면 표시 언어를 바꿀 수 있다고 참고로 안내한다.</a:t>
+            </a:r>
+          </a:p>
         </p:txBody>
       </p:sp>
       <p:sp>
@@ -1711,12 +1716,12 @@
           <a:lstStyle xmlns:a="http://schemas.openxmlformats.org/drawingml/2006/main"/>
           <a:p xmlns:a="http://schemas.openxmlformats.org/drawingml/2006/main">
             <a:r>
-              <a:t>특강에서 사용한 것과 같은 DeepSeek V4 Flash Free를 선택한다. /models를 입력하고 free를 검색한 뒤 이름 끝에 Free가 붙은 DeepSeek 항목을 고른다.</a:t>
-            </a:r>
-          </a:p>
-          <a:p xmlns:a="http://schemas.openxmlformats.org/drawingml/2006/main">
-            <a:r>
-              <a:t>무료 모델 목록과 세부 이름은 바뀔 수 있으므로 수업 직전에 교사가 실제 목록을 확인한다. 카드나 결제정보가 필요한 항목은 선택하지 않는다.</a:t>
+              <a:t>대본</a:t>
+            </a:r>
+          </a:p>
+          <a:p xmlns:a="http://schemas.openxmlformats.org/drawingml/2006/main">
+            <a:r>
+              <a:t>지금 보이는 목록은 순위표가 아닙니다. 오른쪽에 Free가 붙은 항목만 현재 무료이고, 주황색 줄은 추천 표시가 아니라 지금 커서가 놓인 위치입니다. 같은 OpenCode를 사용해도 어떤 AI 모델을 고르느냐에 따라 답의 속도와 코드 품질이 달라질 수 있습니다.</a:t>
             </a:r>
           </a:p>
           <a:p xmlns:a="http://schemas.openxmlformats.org/drawingml/2006/main">
@@ -1726,12 +1731,102 @@
           </a:p>
           <a:p xmlns:a="http://schemas.openxmlformats.org/drawingml/2006/main">
             <a:r>
+              <a:t>수업 기본 추천</a:t>
+            </a:r>
+          </a:p>
+          <a:p xmlns:a="http://schemas.openxmlformats.org/drawingml/2006/main">
+            <a:r>
+              <a:t>1. MiMo V2.5 Free: 이번 수업의 기본 모델로 우선 사용한다. Agent와 Coding 작업에 맞게 개발된 범용 모델이라 간단한 Python 작성, 설명, 수정 요청을 한 모델로 이어 가기 좋다.</a:t>
+            </a:r>
+          </a:p>
+          <a:p xmlns:a="http://schemas.openxmlformats.org/drawingml/2006/main">
+            <a:r>
+              <a:t>2. Nemotron 3.5 Lightning Free: MiMo가 느리거나 응답하지 않을 때의 1차 대체 모델이다. 이름의 Lightning처럼 빠른 응답과 코드 검토·도구 사용 같은 비교적 짧고 분명한 작업에 적합하다.</a:t>
+            </a:r>
+          </a:p>
+          <a:p xmlns:a="http://schemas.openxmlformats.org/drawingml/2006/main">
+            <a:r>
+              <a:t>3. Nemotron 3 Ultra Free: 앞의 두 모델이 해결하지 못하는 복잡한 계획이나 오류 수정이 있을 때 교사가 먼저 시험한 뒤 대체한다. 더 깊은 추론을 기대할 수 있지만 수업의 단순 실습에는 과할 수 있다.</a:t>
+            </a:r>
+          </a:p>
+          <a:p xmlns:a="http://schemas.openxmlformats.org/drawingml/2006/main">
+            <a:r>
+              <a:t/>
+            </a:r>
+          </a:p>
+          <a:p xmlns:a="http://schemas.openxmlformats.org/drawingml/2006/main">
+            <a:r>
+              <a:t>나머지 무료 모델을 설명할 때</a:t>
+            </a:r>
+          </a:p>
+          <a:p xmlns:a="http://schemas.openxmlformats.org/drawingml/2006/main">
+            <a:r>
+              <a:t>- Ling 3.0 Flash Fin Free: 코딩과 일반 Agent 작업을 겨냥한 빠른 계열이다. 위 모델이 불안정할 때의 예비 후보로 둔다.</a:t>
+            </a:r>
+          </a:p>
+          <a:p xmlns:a="http://schemas.openxmlformats.org/drawingml/2006/main">
+            <a:r>
+              <a:t>- Big Pickle: 정체와 세부 성능을 공개하지 않은 stealth 모델이다. 화면에서 선택되어 보이더라도 수업 기본 모델로 지정하지 않는다.</a:t>
+            </a:r>
+          </a:p>
+          <a:p xmlns:a="http://schemas.openxmlformats.org/drawingml/2006/main">
+            <a:r>
+              <a:t>- Muse Spark 1.2 Free: 코딩 작업에 사용할 수 있지만 Contributor Free 조건에서는 입력과 결과가 향후 모델 학습에 사용될 수 있으므로 학교 수업의 기본 모델에서는 제외한다.</a:t>
+            </a:r>
+          </a:p>
+          <a:p xmlns:a="http://schemas.openxmlformats.org/drawingml/2006/main">
+            <a:r>
+              <a:t/>
+            </a:r>
+          </a:p>
+          <a:p xmlns:a="http://schemas.openxmlformats.org/drawingml/2006/main">
+            <a:r>
+              <a:t>교사용 운영 기준</a:t>
+            </a:r>
+          </a:p>
+          <a:p xmlns:a="http://schemas.openxmlformats.org/drawingml/2006/main">
+            <a:r>
+              <a:t>무료 제공은 한시적이고 목록이 바뀔 수 있다. 수업 전날 같은 짧은 Python 요청을 MiMo V2.5 Free와 Nemotron 3.5 Lightning Free에 각각 실행해 보고, 정상 작동하는 하나를 그날의 공통 모델로 지정한다. 학생에게 자유 선택을 맡기지 않고 전원이 같은 모델을 사용하게 해야 설명과 오류 대응이 쉬워진다.</a:t>
+            </a:r>
+          </a:p>
+          <a:p xmlns:a="http://schemas.openxmlformats.org/drawingml/2006/main">
+            <a:r>
+              <a:t>어떤 무료 모델을 사용하더라도 학생 이름, 연락처, 계정정보, API 키, 개인 문서 같은 개인정보나 비밀정보는 입력하지 않는다.</a:t>
+            </a:r>
+          </a:p>
+          <a:p xmlns:a="http://schemas.openxmlformats.org/drawingml/2006/main">
+            <a:r>
+              <a:t/>
+            </a:r>
+          </a:p>
+          <a:p xmlns:a="http://schemas.openxmlformats.org/drawingml/2006/main">
+            <a:r>
               <a:t>[Sources]</a:t>
             </a:r>
           </a:p>
           <a:p xmlns:a="http://schemas.openxmlformats.org/drawingml/2006/main">
             <a:r>
-              <a:t>- Local special-lecture asset: imgs/16_select_model_second.png</a:t>
+              <a:t>- https://opencode.ai/docs/zen/</a:t>
+            </a:r>
+          </a:p>
+          <a:p xmlns:a="http://schemas.openxmlformats.org/drawingml/2006/main">
+            <a:r>
+              <a:t>- https://build.nvidia.com/nvidia/nemotron-3.5-lightning-30b-a3b/modelcard</a:t>
+            </a:r>
+          </a:p>
+          <a:p xmlns:a="http://schemas.openxmlformats.org/drawingml/2006/main">
+            <a:r>
+              <a:t>- https://mimo.mi.com/docs/en-US/news/latest/v2.5-open-sourced</a:t>
+            </a:r>
+          </a:p>
+          <a:p xmlns:a="http://schemas.openxmlformats.org/drawingml/2006/main">
+            <a:r>
+              <a:t>- https://huggingface.co/inclusionAI/Ling-3.0-flash</a:t>
+            </a:r>
+          </a:p>
+          <a:p xmlns:a="http://schemas.openxmlformats.org/drawingml/2006/main">
+            <a:r>
+              <a:t>- User-provided screenshot: /Users/gojiwoong/Desktop/스크린샷 2026-08-31 23.10.13.png</a:t>
             </a:r>
           </a:p>
           <a:p xmlns:a="http://schemas.openxmlformats.org/drawingml/2006/main">
@@ -1957,6 +2052,11 @@
           <a:p xmlns:a="http://schemas.openxmlformats.org/drawingml/2006/main">
             <a:r>
               <a:t>왼쪽은 Notebook 셀 아래에 바로 나온 그래프, 오른쪽은 같은 결과를 발표용 한 장으로 다듬은 모습이다.</a:t>
+            </a:r>
+          </a:p>
+          <a:p xmlns:a="http://schemas.openxmlformats.org/drawingml/2006/main">
+            <a:r>
+              <a:t>100,000줄의 데이터도 그래프로 바꾸면 차이와 흐름을 한눈에 볼 수 있다는 결과 예시다.</a:t>
             </a:r>
           </a:p>
         </p:txBody>
@@ -2529,7 +2629,7 @@
   </p:cSld>
   <p:clrMap bg1="lt1" tx1="dk1" bg2="lt2" tx2="dk2" accent1="accent1" accent2="accent2" accent3="accent3" accent4="accent4" accent5="accent5" accent6="accent6" hlink="hlink" folHlink="folHlink"/>
   <p:sldLayoutIdLst>
-    <p:sldLayoutId xmlns:r="http://schemas.openxmlformats.org/officeDocument/2006/relationships" id="2147483649" r:id="Re8ea8fa622a242f5"/>
+    <p:sldLayoutId xmlns:r="http://schemas.openxmlformats.org/officeDocument/2006/relationships" id="2147483649" r:id="R69751a3264e84789"/>
   </p:sldLayoutIdLst>
   <p:txStyles>
     <p:titleStyle>
@@ -4237,7 +4337,7 @@
           <p:nvPr/>
         </p:nvPicPr>
         <p:blipFill>
-          <a:blip xmlns:r="http://schemas.openxmlformats.org/officeDocument/2006/relationships" xmlns:a="http://schemas.openxmlformats.org/drawingml/2006/main" r:embed="R4d1900b458454b95"/>
+          <a:blip xmlns:r="http://schemas.openxmlformats.org/officeDocument/2006/relationships" xmlns:a="http://schemas.openxmlformats.org/drawingml/2006/main" r:embed="R80b266f47a8147b9"/>
           <a:srcRect xmlns:a="http://schemas.openxmlformats.org/drawingml/2006/main" l="0" t="31" r="0" b="31"/>
           <a:stretch xmlns:a="http://schemas.openxmlformats.org/drawingml/2006/main">
             <a:fillRect l="0" t="0" r="0" b="0"/>
@@ -5099,7 +5199,7 @@
           <p:nvPr/>
         </p:nvPicPr>
         <p:blipFill>
-          <a:blip xmlns:r="http://schemas.openxmlformats.org/officeDocument/2006/relationships" xmlns:a="http://schemas.openxmlformats.org/drawingml/2006/main" r:embed="R2afd25d4d0984ed7"/>
+          <a:blip xmlns:r="http://schemas.openxmlformats.org/officeDocument/2006/relationships" xmlns:a="http://schemas.openxmlformats.org/drawingml/2006/main" r:embed="Rfa19faad60324f85"/>
           <a:srcRect xmlns:a="http://schemas.openxmlformats.org/drawingml/2006/main" l="0" t="0" r="0" b="0"/>
           <a:stretch xmlns:a="http://schemas.openxmlformats.org/drawingml/2006/main">
             <a:fillRect l="0" t="0" r="0" b="0"/>
@@ -5907,7 +6007,7 @@
           <p:nvPr/>
         </p:nvPicPr>
         <p:blipFill>
-          <a:blip xmlns:r="http://schemas.openxmlformats.org/officeDocument/2006/relationships" xmlns:a="http://schemas.openxmlformats.org/drawingml/2006/main" r:embed="Ra6a35c0b10194a4b"/>
+          <a:blip xmlns:r="http://schemas.openxmlformats.org/officeDocument/2006/relationships" xmlns:a="http://schemas.openxmlformats.org/drawingml/2006/main" r:embed="Rbe20ce3beb0548ee"/>
           <a:srcRect xmlns:a="http://schemas.openxmlformats.org/drawingml/2006/main" l="0" t="31" r="0" b="31"/>
           <a:stretch xmlns:a="http://schemas.openxmlformats.org/drawingml/2006/main">
             <a:fillRect l="0" t="0" r="0" b="0"/>
@@ -6742,7 +6842,7 @@
           <p:nvPr/>
         </p:nvPicPr>
         <p:blipFill>
-          <a:blip xmlns:r="http://schemas.openxmlformats.org/officeDocument/2006/relationships" xmlns:a="http://schemas.openxmlformats.org/drawingml/2006/main" r:embed="Rbea99bf4ff53472e"/>
+          <a:blip xmlns:r="http://schemas.openxmlformats.org/officeDocument/2006/relationships" xmlns:a="http://schemas.openxmlformats.org/drawingml/2006/main" r:embed="R911150c05e9f49f3"/>
           <a:srcRect xmlns:a="http://schemas.openxmlformats.org/drawingml/2006/main" l="0" t="0" r="0" b="0"/>
           <a:stretch xmlns:a="http://schemas.openxmlformats.org/drawingml/2006/main">
             <a:fillRect l="0" t="0" r="0" b="0"/>
@@ -7550,7 +7650,7 @@
           <p:nvPr/>
         </p:nvPicPr>
         <p:blipFill>
-          <a:blip xmlns:r="http://schemas.openxmlformats.org/officeDocument/2006/relationships" xmlns:a="http://schemas.openxmlformats.org/drawingml/2006/main" r:embed="Rd5ef64f499654230"/>
+          <a:blip xmlns:r="http://schemas.openxmlformats.org/officeDocument/2006/relationships" xmlns:a="http://schemas.openxmlformats.org/drawingml/2006/main" r:embed="R9bbdca04cb9f4822"/>
           <a:srcRect xmlns:a="http://schemas.openxmlformats.org/drawingml/2006/main" l="0" t="0" r="0" b="0"/>
           <a:stretch xmlns:a="http://schemas.openxmlformats.org/drawingml/2006/main">
             <a:fillRect l="0" t="0" r="0" b="0"/>
@@ -9647,7 +9747,7 @@
           <p:nvPr/>
         </p:nvPicPr>
         <p:blipFill>
-          <a:blip xmlns:r="http://schemas.openxmlformats.org/officeDocument/2006/relationships" xmlns:a="http://schemas.openxmlformats.org/drawingml/2006/main" r:embed="Rad24269de43c4d0b"/>
+          <a:blip xmlns:r="http://schemas.openxmlformats.org/officeDocument/2006/relationships" xmlns:a="http://schemas.openxmlformats.org/drawingml/2006/main" r:embed="R2fef2f0b2f4f49fe"/>
           <a:srcRect xmlns:a="http://schemas.openxmlformats.org/drawingml/2006/main" l="0" t="31" r="0" b="31"/>
           <a:stretch xmlns:a="http://schemas.openxmlformats.org/drawingml/2006/main">
             <a:fillRect l="0" t="0" r="0" b="0"/>
@@ -10505,7 +10605,7 @@
           <p:nvPr/>
         </p:nvPicPr>
         <p:blipFill>
-          <a:blip xmlns:r="http://schemas.openxmlformats.org/officeDocument/2006/relationships" xmlns:a="http://schemas.openxmlformats.org/drawingml/2006/main" r:embed="R3df082942dbe42c6"/>
+          <a:blip xmlns:r="http://schemas.openxmlformats.org/officeDocument/2006/relationships" xmlns:a="http://schemas.openxmlformats.org/drawingml/2006/main" r:embed="R5634e972a7de4416"/>
           <a:srcRect xmlns:a="http://schemas.openxmlformats.org/drawingml/2006/main" l="0" t="0" r="0" b="0"/>
           <a:stretch xmlns:a="http://schemas.openxmlformats.org/drawingml/2006/main">
             <a:fillRect l="0" t="0" r="0" b="0"/>
@@ -11313,7 +11413,7 @@
           <p:nvPr/>
         </p:nvPicPr>
         <p:blipFill>
-          <a:blip xmlns:r="http://schemas.openxmlformats.org/officeDocument/2006/relationships" xmlns:a="http://schemas.openxmlformats.org/drawingml/2006/main" r:embed="R055e30f1a26d4bf8"/>
+          <a:blip xmlns:r="http://schemas.openxmlformats.org/officeDocument/2006/relationships" xmlns:a="http://schemas.openxmlformats.org/drawingml/2006/main" r:embed="R43e71d916ed1440f"/>
           <a:srcRect xmlns:a="http://schemas.openxmlformats.org/drawingml/2006/main" l="0" t="31" r="0" b="31"/>
           <a:stretch xmlns:a="http://schemas.openxmlformats.org/drawingml/2006/main">
             <a:fillRect l="0" t="0" r="0" b="0"/>
@@ -12004,8 +12104,8 @@
         </p:nvSpPr>
         <p:spPr>
           <a:xfrm xmlns:a="http://schemas.openxmlformats.org/drawingml/2006/main">
-            <a:off x="8020050" y="5010150"/>
-            <a:ext cx="2857500" cy="457200"/>
+            <a:off x="8020050" y="4695825"/>
+            <a:ext cx="2857500" cy="838200"/>
           </a:xfrm>
           <a:prstGeom xmlns:a="http://schemas.openxmlformats.org/drawingml/2006/main" prst="rect">
             <a:avLst/>
@@ -12018,7 +12118,7 @@
         </p:spPr>
         <p:txBody>
           <a:bodyPr xmlns:a="http://schemas.openxmlformats.org/drawingml/2006/main" anchor="t">
-            <a:normAutofit fontScale="81602"/>
+            <a:normAutofit fontScale="100000"/>
           </a:bodyPr>
           <a:lstStyle xmlns:a="http://schemas.openxmlformats.org/drawingml/2006/main"/>
           <a:p xmlns:a="http://schemas.openxmlformats.org/drawingml/2006/main">
@@ -12027,25 +12127,79 @@
                 <a:spcPct val="112000"/>
               </a:lnSpc>
               <a:buNone/>
-              <a:defRPr sz="1313" b="0">
-                <a:solidFill>
-                  <a:srgbClr val="6C7078"/>
-                </a:solidFill>
-                <a:latin typeface="IBM Plex Sans KR"/>
-                <a:ea typeface="IBM Plex Sans KR"/>
-                <a:cs typeface="IBM Plex Sans KR"/>
-              </a:defRPr>
-            </a:pPr>
-            <a:r>
-              <a:rPr sz="1313" b="0">
-                <a:solidFill>
-                  <a:srgbClr val="6C7078"/>
-                </a:solidFill>
-                <a:latin typeface="IBM Plex Sans KR"/>
-                <a:ea typeface="IBM Plex Sans KR"/>
-                <a:cs typeface="IBM Plex Sans KR"/>
-              </a:rPr>
-              <a:t>Install을 누른 뒤 재시작 안내가 보이면 적용합니다.</a:t>
+              <a:defRPr sz="1050" b="0">
+                <a:solidFill>
+                  <a:srgbClr val="475569"/>
+                </a:solidFill>
+                <a:latin typeface="IBM Plex Sans KR"/>
+                <a:ea typeface="IBM Plex Sans KR"/>
+                <a:cs typeface="IBM Plex Sans KR"/>
+              </a:defRPr>
+            </a:pPr>
+            <a:r>
+              <a:rPr sz="1050" b="0">
+                <a:solidFill>
+                  <a:srgbClr val="475569"/>
+                </a:solidFill>
+                <a:latin typeface="IBM Plex Sans KR"/>
+                <a:ea typeface="IBM Plex Sans KR"/>
+                <a:cs typeface="IBM Plex Sans KR"/>
+              </a:rPr>
+              <a:t>참고 · 한국어·중국어를 모두 설치했다면</a:t>
+            </a:r>
+          </a:p>
+          <a:p xmlns:a="http://schemas.openxmlformats.org/drawingml/2006/main">
+            <a:pPr algn="l">
+              <a:lnSpc>
+                <a:spcPct val="112000"/>
+              </a:lnSpc>
+              <a:buNone/>
+              <a:defRPr sz="1050" b="0">
+                <a:solidFill>
+                  <a:srgbClr val="475569"/>
+                </a:solidFill>
+                <a:latin typeface="IBM Plex Sans KR"/>
+                <a:ea typeface="IBM Plex Sans KR"/>
+                <a:cs typeface="IBM Plex Sans KR"/>
+              </a:defRPr>
+            </a:pPr>
+            <a:r>
+              <a:rPr sz="1050" b="0">
+                <a:solidFill>
+                  <a:srgbClr val="475569"/>
+                </a:solidFill>
+                <a:latin typeface="IBM Plex Sans KR"/>
+                <a:ea typeface="IBM Plex Sans KR"/>
+                <a:cs typeface="IBM Plex Sans KR"/>
+              </a:rPr>
+              <a:t>Ctrl + Shift + P → Configure Display Language</a:t>
+            </a:r>
+          </a:p>
+          <a:p xmlns:a="http://schemas.openxmlformats.org/drawingml/2006/main">
+            <a:pPr algn="l">
+              <a:lnSpc>
+                <a:spcPct val="112000"/>
+              </a:lnSpc>
+              <a:buNone/>
+              <a:defRPr sz="1050" b="0">
+                <a:solidFill>
+                  <a:srgbClr val="475569"/>
+                </a:solidFill>
+                <a:latin typeface="IBM Plex Sans KR"/>
+                <a:ea typeface="IBM Plex Sans KR"/>
+                <a:cs typeface="IBM Plex Sans KR"/>
+              </a:defRPr>
+            </a:pPr>
+            <a:r>
+              <a:rPr sz="1050" b="0">
+                <a:solidFill>
+                  <a:srgbClr val="475569"/>
+                </a:solidFill>
+                <a:latin typeface="IBM Plex Sans KR"/>
+                <a:ea typeface="IBM Plex Sans KR"/>
+                <a:cs typeface="IBM Plex Sans KR"/>
+              </a:rPr>
+              <a:t>→ 언어 선택 후 VS Code 재시작</a:t>
             </a:r>
           </a:p>
         </p:txBody>
@@ -12121,7 +12275,7 @@
           <p:nvPr/>
         </p:nvPicPr>
         <p:blipFill>
-          <a:blip xmlns:r="http://schemas.openxmlformats.org/officeDocument/2006/relationships" xmlns:a="http://schemas.openxmlformats.org/drawingml/2006/main" r:embed="Rd6041cd4417c4089"/>
+          <a:blip xmlns:r="http://schemas.openxmlformats.org/officeDocument/2006/relationships" xmlns:a="http://schemas.openxmlformats.org/drawingml/2006/main" r:embed="R5b00a89e6f0a40dc"/>
           <a:srcRect xmlns:a="http://schemas.openxmlformats.org/drawingml/2006/main" l="0" t="0" r="0" b="0"/>
           <a:stretch xmlns:a="http://schemas.openxmlformats.org/drawingml/2006/main">
             <a:fillRect l="0" t="0" r="0" b="0"/>
@@ -12553,7 +12707,7 @@
           <p:nvPr/>
         </p:nvPicPr>
         <p:blipFill>
-          <a:blip xmlns:r="http://schemas.openxmlformats.org/officeDocument/2006/relationships" xmlns:a="http://schemas.openxmlformats.org/drawingml/2006/main" r:embed="R4e00b03c13e5467e"/>
+          <a:blip xmlns:r="http://schemas.openxmlformats.org/officeDocument/2006/relationships" xmlns:a="http://schemas.openxmlformats.org/drawingml/2006/main" r:embed="Rdec20db8c1374181"/>
           <a:srcRect xmlns:a="http://schemas.openxmlformats.org/drawingml/2006/main" l="0" t="0" r="0" b="0"/>
           <a:stretch xmlns:a="http://schemas.openxmlformats.org/drawingml/2006/main">
             <a:fillRect l="0" t="0" r="0" b="0"/>
@@ -12580,7 +12734,7 @@
           <p:nvPr/>
         </p:nvPicPr>
         <p:blipFill>
-          <a:blip xmlns:r="http://schemas.openxmlformats.org/officeDocument/2006/relationships" xmlns:a="http://schemas.openxmlformats.org/drawingml/2006/main" r:embed="Re20f492cd8474940"/>
+          <a:blip xmlns:r="http://schemas.openxmlformats.org/officeDocument/2006/relationships" xmlns:a="http://schemas.openxmlformats.org/drawingml/2006/main" r:embed="Rf6247ee396644733"/>
           <a:srcRect xmlns:a="http://schemas.openxmlformats.org/drawingml/2006/main" l="62" t="0" r="62" b="0"/>
           <a:stretch xmlns:a="http://schemas.openxmlformats.org/drawingml/2006/main">
             <a:fillRect l="0" t="0" r="0" b="0"/>
@@ -14299,7 +14453,7 @@
           <p:nvPr/>
         </p:nvPicPr>
         <p:blipFill>
-          <a:blip xmlns:r="http://schemas.openxmlformats.org/officeDocument/2006/relationships" xmlns:a="http://schemas.openxmlformats.org/drawingml/2006/main" r:embed="R3cd7fa9e0d1e4228"/>
+          <a:blip xmlns:r="http://schemas.openxmlformats.org/officeDocument/2006/relationships" xmlns:a="http://schemas.openxmlformats.org/drawingml/2006/main" r:embed="Rc148c7c663fb4bed"/>
           <a:stretch xmlns:a="http://schemas.openxmlformats.org/drawingml/2006/main"/>
         </p:blipFill>
         <p:spPr>
@@ -15015,7 +15169,7 @@
           <p:nvPr/>
         </p:nvPicPr>
         <p:blipFill>
-          <a:blip xmlns:r="http://schemas.openxmlformats.org/officeDocument/2006/relationships" xmlns:a="http://schemas.openxmlformats.org/drawingml/2006/main" r:embed="R31c6a594b93241e5"/>
+          <a:blip xmlns:r="http://schemas.openxmlformats.org/officeDocument/2006/relationships" xmlns:a="http://schemas.openxmlformats.org/drawingml/2006/main" r:embed="R9729745445db4f02"/>
           <a:stretch xmlns:a="http://schemas.openxmlformats.org/drawingml/2006/main"/>
         </p:blipFill>
         <p:spPr>
@@ -15039,7 +15193,7 @@
           <p:nvPr/>
         </p:nvPicPr>
         <p:blipFill>
-          <a:blip xmlns:r="http://schemas.openxmlformats.org/officeDocument/2006/relationships" xmlns:a="http://schemas.openxmlformats.org/drawingml/2006/main" r:embed="Rbac341cf01484f2f"/>
+          <a:blip xmlns:r="http://schemas.openxmlformats.org/officeDocument/2006/relationships" xmlns:a="http://schemas.openxmlformats.org/drawingml/2006/main" r:embed="Re7e4d3487e014d67"/>
           <a:stretch xmlns:a="http://schemas.openxmlformats.org/drawingml/2006/main"/>
         </p:blipFill>
         <p:spPr>
@@ -15592,7 +15746,7 @@
                 <a:ea typeface="IBM Plex Sans KR"/>
                 <a:cs typeface="IBM Plex Sans KR"/>
               </a:rPr>
-              <a:t>무료 모델 DeepSeek V4 Flash를 선택합니다</a:t>
+              <a:t>교사가 지정한 Free 모델을 선택합니다</a:t>
             </a:r>
           </a:p>
         </p:txBody>
@@ -15761,15 +15915,15 @@
           <p:nvPr/>
         </p:nvPicPr>
         <p:blipFill>
-          <a:blip xmlns:r="http://schemas.openxmlformats.org/officeDocument/2006/relationships" xmlns:a="http://schemas.openxmlformats.org/drawingml/2006/main" r:embed="Rd03d433f4e9c4d7e"/>
+          <a:blip xmlns:r="http://schemas.openxmlformats.org/officeDocument/2006/relationships" xmlns:a="http://schemas.openxmlformats.org/drawingml/2006/main" r:embed="R1a48619558b6417d"/>
           <a:stretch xmlns:a="http://schemas.openxmlformats.org/drawingml/2006/main"/>
         </p:blipFill>
         <p:spPr>
-          <a:xfrm xmlns:a="http://schemas.openxmlformats.org/drawingml/2006/main" flipH="0" flipV="0">
-            <a:off x="535517" y="1819275"/>
-            <a:ext cx="6891867" cy="3876675"/>
-          </a:xfrm>
-          <a:prstGeom xmlns:a="http://schemas.openxmlformats.org/drawingml/2006/main" prst="roundRect">
+          <a:xfrm xmlns:a="http://schemas.openxmlformats.org/drawingml/2006/main" rot="0" flipH="0" flipV="0">
+            <a:off x="1343025" y="1621712"/>
+            <a:ext cx="5276850" cy="4376577"/>
+          </a:xfrm>
+          <a:prstGeom xmlns:a="http://schemas.openxmlformats.org/drawingml/2006/main" prst="rect">
             <a:avLst/>
           </a:prstGeom>
         </p:spPr>
@@ -15921,7 +16075,7 @@
                 <a:ea typeface="Pretendard"/>
                 <a:cs typeface="Pretendard"/>
               </a:rPr>
-              <a:t>1. free를 검색합니다.</a:t>
+              <a:t>1. /models를 입력합니다.</a:t>
             </a:r>
           </a:p>
           <a:p xmlns:a="http://schemas.openxmlformats.org/drawingml/2006/main">
@@ -15948,7 +16102,7 @@
                 <a:ea typeface="Pretendard"/>
                 <a:cs typeface="Pretendard"/>
               </a:rPr>
-              <a:t>2. DeepSeek V4 Flash Free를 고릅니다.</a:t>
+              <a:t>2. 교사가 지정한 모델을 고릅니다.</a:t>
             </a:r>
           </a:p>
           <a:p xmlns:a="http://schemas.openxmlformats.org/drawingml/2006/main">
@@ -15975,7 +16129,7 @@
                 <a:ea typeface="Pretendard"/>
                 <a:cs typeface="Pretendard"/>
               </a:rPr>
-              <a:t>3. 이름 끝의 Free를 확인합니다.</a:t>
+              <a:t>3. Free 표시를 확인합니다.</a:t>
             </a:r>
           </a:p>
         </p:txBody>
@@ -16032,7 +16186,7 @@
                 <a:ea typeface="Pretendard"/>
                 <a:cs typeface="Pretendard"/>
               </a:rPr>
-              <a:t>특강과 같은 모델입니다. 목록이 바뀌면 교사가 확인한 Free DeepSeek를 선택합니다.</a:t>
+              <a:t>무료 모델 목록은 바뀔 수 있습니다. 수업 당일 교사가 확인한 Free 모델을 선택합니다.</a:t>
             </a:r>
           </a:p>
         </p:txBody>
@@ -18577,7 +18731,7 @@
                 <a:ea typeface="IBM Plex Sans KR"/>
                 <a:cs typeface="IBM Plex Sans KR"/>
               </a:rPr>
-              <a:t>많은 기록을 그래프로 바꾸면 한눈에 보입니다</a:t>
+              <a:t>100,000줄의 데이터를 그래프로 한눈에 본다</a:t>
             </a:r>
           </a:p>
         </p:txBody>
@@ -18746,7 +18900,7 @@
           <p:nvPr/>
         </p:nvPicPr>
         <p:blipFill>
-          <a:blip xmlns:r="http://schemas.openxmlformats.org/officeDocument/2006/relationships" xmlns:a="http://schemas.openxmlformats.org/drawingml/2006/main" r:embed="R7f1b246cd3184d15"/>
+          <a:blip xmlns:r="http://schemas.openxmlformats.org/officeDocument/2006/relationships" xmlns:a="http://schemas.openxmlformats.org/drawingml/2006/main" r:embed="Rec901c3bbe1b491e"/>
           <a:srcRect xmlns:a="http://schemas.openxmlformats.org/drawingml/2006/main" l="0" t="0" r="0" b="0"/>
           <a:stretch xmlns:a="http://schemas.openxmlformats.org/drawingml/2006/main">
             <a:fillRect l="0" t="0" r="0" b="0"/>
@@ -18773,7 +18927,7 @@
           <p:nvPr/>
         </p:nvPicPr>
         <p:blipFill>
-          <a:blip xmlns:r="http://schemas.openxmlformats.org/officeDocument/2006/relationships" xmlns:a="http://schemas.openxmlformats.org/drawingml/2006/main" r:embed="R0573e48952be4f62"/>
+          <a:blip xmlns:r="http://schemas.openxmlformats.org/officeDocument/2006/relationships" xmlns:a="http://schemas.openxmlformats.org/drawingml/2006/main" r:embed="R208b4389cabd41f2"/>
           <a:srcRect xmlns:a="http://schemas.openxmlformats.org/drawingml/2006/main" l="71" t="0" r="71" b="0"/>
           <a:stretch xmlns:a="http://schemas.openxmlformats.org/drawingml/2006/main">
             <a:fillRect l="0" t="0" r="0" b="0"/>
@@ -22854,7 +23008,7 @@
           <p:nvPr/>
         </p:nvPicPr>
         <p:blipFill>
-          <a:blip xmlns:r="http://schemas.openxmlformats.org/officeDocument/2006/relationships" xmlns:a="http://schemas.openxmlformats.org/drawingml/2006/main" r:embed="R073bf49189ce4d9e"/>
+          <a:blip xmlns:r="http://schemas.openxmlformats.org/officeDocument/2006/relationships" xmlns:a="http://schemas.openxmlformats.org/drawingml/2006/main" r:embed="R0cdf6641f9c24e76"/>
           <a:srcRect xmlns:a="http://schemas.openxmlformats.org/drawingml/2006/main" l="0" t="31" r="0" b="31"/>
           <a:stretch xmlns:a="http://schemas.openxmlformats.org/drawingml/2006/main">
             <a:fillRect l="0" t="0" r="0" b="0"/>
@@ -23662,7 +23816,7 @@
           <p:nvPr/>
         </p:nvPicPr>
         <p:blipFill>
-          <a:blip xmlns:r="http://schemas.openxmlformats.org/officeDocument/2006/relationships" xmlns:a="http://schemas.openxmlformats.org/drawingml/2006/main" r:embed="R89c1e3d2981e4398"/>
+          <a:blip xmlns:r="http://schemas.openxmlformats.org/officeDocument/2006/relationships" xmlns:a="http://schemas.openxmlformats.org/drawingml/2006/main" r:embed="R17852fab74734dd2"/>
           <a:srcRect xmlns:a="http://schemas.openxmlformats.org/drawingml/2006/main" l="0" t="0" r="0" b="0"/>
           <a:stretch xmlns:a="http://schemas.openxmlformats.org/drawingml/2006/main">
             <a:fillRect l="0" t="0" r="0" b="0"/>
@@ -25447,7 +25601,7 @@
           <p:nvPr/>
         </p:nvPicPr>
         <p:blipFill>
-          <a:blip xmlns:r="http://schemas.openxmlformats.org/officeDocument/2006/relationships" xmlns:a="http://schemas.openxmlformats.org/drawingml/2006/main" r:embed="R501e5c7722e4435f"/>
+          <a:blip xmlns:r="http://schemas.openxmlformats.org/officeDocument/2006/relationships" xmlns:a="http://schemas.openxmlformats.org/drawingml/2006/main" r:embed="Re223bd9d963b4ce2"/>
           <a:srcRect xmlns:a="http://schemas.openxmlformats.org/drawingml/2006/main" l="0" t="0" r="0" b="0"/>
           <a:stretch xmlns:a="http://schemas.openxmlformats.org/drawingml/2006/main">
             <a:fillRect l="0" t="0" r="0" b="0"/>
